--- a/examples/Emmy Noether.pptx
+++ b/examples/Emmy Noether.pptx
@@ -542,6 +542,17 @@
           <a:p>
             <a:r>
               <a:t>https://en.wikipedia.org/wiki/Emmy_Noether</a:t>
+            </a:r>
+          </a:p>
+          <a:p/>
+          <a:p>
+            <a:r>
+              <a:t>Photos:</a:t>
+            </a:r>
+          </a:p>
+          <a:p>
+            <a:r>
+              <a:t>https://upload.wikimedia.org/wikipedia/commons/thumb/e/e5/Noether.jpg/330px-Noether.jpg</a:t>
             </a:r>
           </a:p>
           <a:p/>

--- a/examples/Emmy Noether.pptx
+++ b/examples/Emmy Noether.pptx
@@ -4,6 +4,9 @@
   <p:sldMasterIdLst>
     <p:sldMasterId id="2147483648" r:id="rId1"/>
   </p:sldMasterIdLst>
+  <p:notesMasterIdLst>
+    <p:notesMasterId r:id="rId8"/>
+  </p:notesMasterIdLst>
   <p:sldIdLst>
     <p:sldId id="256" r:id="rId7"/>
   </p:sldIdLst>
